--- a/HW1.pptx
+++ b/HW1.pptx
@@ -233,7 +233,7 @@
           <a:p>
             <a:fld id="{0232EA5A-78E9-C344-AE66-29667172F472}" type="datetimeFigureOut">
               <a:rPr lang="ru-RU" smtClean="0"/>
-              <a:t>01.03.2026</a:t>
+              <a:t>04.03.2026</a:t>
             </a:fld>
             <a:endParaRPr lang="ru-RU"/>
           </a:p>
@@ -1451,7 +1451,7 @@
           <a:p>
             <a:fld id="{562AAE1C-AD26-7D47-968A-4C8520CF2294}" type="datetimeFigureOut">
               <a:rPr lang="ru-RU" smtClean="0"/>
-              <a:t>01.03.2026</a:t>
+              <a:t>04.03.2026</a:t>
             </a:fld>
             <a:endParaRPr lang="ru-RU"/>
           </a:p>
@@ -1649,7 +1649,7 @@
           <a:p>
             <a:fld id="{562AAE1C-AD26-7D47-968A-4C8520CF2294}" type="datetimeFigureOut">
               <a:rPr lang="ru-RU" smtClean="0"/>
-              <a:t>01.03.2026</a:t>
+              <a:t>04.03.2026</a:t>
             </a:fld>
             <a:endParaRPr lang="ru-RU"/>
           </a:p>
@@ -1857,7 +1857,7 @@
           <a:p>
             <a:fld id="{562AAE1C-AD26-7D47-968A-4C8520CF2294}" type="datetimeFigureOut">
               <a:rPr lang="ru-RU" smtClean="0"/>
-              <a:t>01.03.2026</a:t>
+              <a:t>04.03.2026</a:t>
             </a:fld>
             <a:endParaRPr lang="ru-RU"/>
           </a:p>
@@ -2055,7 +2055,7 @@
           <a:p>
             <a:fld id="{562AAE1C-AD26-7D47-968A-4C8520CF2294}" type="datetimeFigureOut">
               <a:rPr lang="ru-RU" smtClean="0"/>
-              <a:t>01.03.2026</a:t>
+              <a:t>04.03.2026</a:t>
             </a:fld>
             <a:endParaRPr lang="ru-RU"/>
           </a:p>
@@ -2330,7 +2330,7 @@
           <a:p>
             <a:fld id="{562AAE1C-AD26-7D47-968A-4C8520CF2294}" type="datetimeFigureOut">
               <a:rPr lang="ru-RU" smtClean="0"/>
-              <a:t>01.03.2026</a:t>
+              <a:t>04.03.2026</a:t>
             </a:fld>
             <a:endParaRPr lang="ru-RU"/>
           </a:p>
@@ -2595,7 +2595,7 @@
           <a:p>
             <a:fld id="{562AAE1C-AD26-7D47-968A-4C8520CF2294}" type="datetimeFigureOut">
               <a:rPr lang="ru-RU" smtClean="0"/>
-              <a:t>01.03.2026</a:t>
+              <a:t>04.03.2026</a:t>
             </a:fld>
             <a:endParaRPr lang="ru-RU"/>
           </a:p>
@@ -3007,7 +3007,7 @@
           <a:p>
             <a:fld id="{562AAE1C-AD26-7D47-968A-4C8520CF2294}" type="datetimeFigureOut">
               <a:rPr lang="ru-RU" smtClean="0"/>
-              <a:t>01.03.2026</a:t>
+              <a:t>04.03.2026</a:t>
             </a:fld>
             <a:endParaRPr lang="ru-RU"/>
           </a:p>
@@ -3148,7 +3148,7 @@
           <a:p>
             <a:fld id="{562AAE1C-AD26-7D47-968A-4C8520CF2294}" type="datetimeFigureOut">
               <a:rPr lang="ru-RU" smtClean="0"/>
-              <a:t>01.03.2026</a:t>
+              <a:t>04.03.2026</a:t>
             </a:fld>
             <a:endParaRPr lang="ru-RU"/>
           </a:p>
@@ -3261,7 +3261,7 @@
           <a:p>
             <a:fld id="{562AAE1C-AD26-7D47-968A-4C8520CF2294}" type="datetimeFigureOut">
               <a:rPr lang="ru-RU" smtClean="0"/>
-              <a:t>01.03.2026</a:t>
+              <a:t>04.03.2026</a:t>
             </a:fld>
             <a:endParaRPr lang="ru-RU"/>
           </a:p>
@@ -3572,7 +3572,7 @@
           <a:p>
             <a:fld id="{562AAE1C-AD26-7D47-968A-4C8520CF2294}" type="datetimeFigureOut">
               <a:rPr lang="ru-RU" smtClean="0"/>
-              <a:t>01.03.2026</a:t>
+              <a:t>04.03.2026</a:t>
             </a:fld>
             <a:endParaRPr lang="ru-RU"/>
           </a:p>
@@ -3860,7 +3860,7 @@
           <a:p>
             <a:fld id="{562AAE1C-AD26-7D47-968A-4C8520CF2294}" type="datetimeFigureOut">
               <a:rPr lang="ru-RU" smtClean="0"/>
-              <a:t>01.03.2026</a:t>
+              <a:t>04.03.2026</a:t>
             </a:fld>
             <a:endParaRPr lang="ru-RU"/>
           </a:p>
@@ -4101,7 +4101,7 @@
           <a:p>
             <a:fld id="{562AAE1C-AD26-7D47-968A-4C8520CF2294}" type="datetimeFigureOut">
               <a:rPr lang="ru-RU" smtClean="0"/>
-              <a:t>01.03.2026</a:t>
+              <a:t>04.03.2026</a:t>
             </a:fld>
             <a:endParaRPr lang="ru-RU"/>
           </a:p>
@@ -4546,7 +4546,7 @@
         </p:nvSpPr>
         <p:spPr>
           <a:xfrm>
-            <a:off x="426308" y="1061046"/>
+            <a:off x="443893" y="986904"/>
             <a:ext cx="11339384" cy="4109484"/>
           </a:xfrm>
           <a:effectLst>
@@ -4572,7 +4572,7 @@
               </a:spcBef>
             </a:pPr>
             <a:r>
-              <a:rPr lang="ru-RU" sz="13000" b="1" dirty="0">
+              <a:rPr lang="ru-RU" sz="12000" b="1" dirty="0">
                 <a:solidFill>
                   <a:schemeClr val="bg1">
                     <a:lumMod val="75000"/>
@@ -4582,7 +4582,7 @@
               </a:rPr>
               <a:t>КЛИЕНТСКАЯ АНАЛИТИКА</a:t>
             </a:r>
-            <a:endParaRPr lang="ru-RU" sz="13000" dirty="0">
+            <a:endParaRPr lang="ru-RU" sz="12000" dirty="0">
               <a:solidFill>
                 <a:schemeClr val="bg1">
                   <a:lumMod val="75000"/>
@@ -4611,7 +4611,7 @@
         </p:nvSpPr>
         <p:spPr>
           <a:xfrm>
-            <a:off x="2540766" y="212851"/>
+            <a:off x="2540766" y="237565"/>
             <a:ext cx="9501516" cy="574589"/>
           </a:xfrm>
         </p:spPr>
@@ -4719,7 +4719,7 @@
         </p:nvSpPr>
         <p:spPr>
           <a:xfrm>
-            <a:off x="511512" y="1061046"/>
+            <a:off x="511512" y="986904"/>
             <a:ext cx="11339384" cy="4109484"/>
           </a:xfrm>
           <a:prstGeom prst="rect">
@@ -4766,7 +4766,7 @@
               </a:spcBef>
             </a:pPr>
             <a:r>
-              <a:rPr lang="ru-RU" sz="13000" b="1" dirty="0">
+              <a:rPr lang="ru-RU" sz="12000" b="1" dirty="0">
                 <a:solidFill>
                   <a:srgbClr val="800000"/>
                 </a:solidFill>
@@ -4774,7 +4774,7 @@
               </a:rPr>
               <a:t>КЛИЕНТСКАЯ АНАЛИТИКА</a:t>
             </a:r>
-            <a:endParaRPr lang="ru-RU" sz="13000" dirty="0">
+            <a:endParaRPr lang="ru-RU" sz="12000" dirty="0">
               <a:solidFill>
                 <a:schemeClr val="bg1">
                   <a:lumMod val="50000"/>

--- a/HW1.pptx
+++ b/HW1.pptx
@@ -5,7 +5,7 @@
     <p:sldMasterId id="2147483648" r:id="rId1"/>
   </p:sldMasterIdLst>
   <p:notesMasterIdLst>
-    <p:notesMasterId r:id="rId39"/>
+    <p:notesMasterId r:id="rId41"/>
   </p:notesMasterIdLst>
   <p:sldIdLst>
     <p:sldId id="256" r:id="rId2"/>
@@ -45,6 +45,8 @@
     <p:sldId id="297" r:id="rId36"/>
     <p:sldId id="300" r:id="rId37"/>
     <p:sldId id="301" r:id="rId38"/>
+    <p:sldId id="302" r:id="rId39"/>
+    <p:sldId id="303" r:id="rId40"/>
   </p:sldIdLst>
   <p:sldSz cx="12192000" cy="6858000"/>
   <p:notesSz cx="6858000" cy="9144000"/>
@@ -575,6 +577,198 @@
     <p:extLst>
       <p:ext uri="{BB962C8B-B14F-4D97-AF65-F5344CB8AC3E}">
         <p14:creationId xmlns:p14="http://schemas.microsoft.com/office/powerpoint/2010/main" val="303568608"/>
+      </p:ext>
+    </p:extLst>
+  </p:cSld>
+  <p:clrMapOvr>
+    <a:masterClrMapping/>
+  </p:clrMapOvr>
+</p:notes>
+</file>
+
+<file path=ppt/notesSlides/notesSlide10.xml><?xml version="1.0" encoding="utf-8"?>
+<p:notes xmlns:a="http://schemas.openxmlformats.org/drawingml/2006/main" xmlns:r="http://schemas.openxmlformats.org/officeDocument/2006/relationships" xmlns:p="http://schemas.openxmlformats.org/presentationml/2006/main">
+  <p:cSld>
+    <p:spTree>
+      <p:nvGrpSpPr>
+        <p:cNvPr id="1" name=""/>
+        <p:cNvGrpSpPr/>
+        <p:nvPr/>
+      </p:nvGrpSpPr>
+      <p:grpSpPr>
+        <a:xfrm>
+          <a:off x="0" y="0"/>
+          <a:ext cx="0" cy="0"/>
+          <a:chOff x="0" y="0"/>
+          <a:chExt cx="0" cy="0"/>
+        </a:xfrm>
+      </p:grpSpPr>
+      <p:sp>
+        <p:nvSpPr>
+          <p:cNvPr id="2" name="Образ слайда 1"/>
+          <p:cNvSpPr>
+            <a:spLocks noGrp="1" noRot="1" noChangeAspect="1"/>
+          </p:cNvSpPr>
+          <p:nvPr>
+            <p:ph type="sldImg"/>
+          </p:nvPr>
+        </p:nvSpPr>
+        <p:spPr/>
+      </p:sp>
+      <p:sp>
+        <p:nvSpPr>
+          <p:cNvPr id="3" name="Заметки 2"/>
+          <p:cNvSpPr>
+            <a:spLocks noGrp="1"/>
+          </p:cNvSpPr>
+          <p:nvPr>
+            <p:ph type="body" idx="1"/>
+          </p:nvPr>
+        </p:nvSpPr>
+        <p:spPr/>
+        <p:txBody>
+          <a:bodyPr/>
+          <a:lstStyle/>
+          <a:p>
+            <a:endParaRPr lang="ru-RU" dirty="0"/>
+          </a:p>
+        </p:txBody>
+      </p:sp>
+      <p:sp>
+        <p:nvSpPr>
+          <p:cNvPr id="4" name="Номер слайда 3"/>
+          <p:cNvSpPr>
+            <a:spLocks noGrp="1"/>
+          </p:cNvSpPr>
+          <p:nvPr>
+            <p:ph type="sldNum" sz="quarter" idx="5"/>
+          </p:nvPr>
+        </p:nvSpPr>
+        <p:spPr/>
+        <p:txBody>
+          <a:bodyPr/>
+          <a:lstStyle/>
+          <a:p>
+            <a:fld id="{D6442E75-1FDF-C648-8CC6-4BEE00EE7D3D}" type="slidenum">
+              <a:rPr lang="ru-RU" smtClean="0"/>
+              <a:t>38</a:t>
+            </a:fld>
+            <a:endParaRPr lang="ru-RU"/>
+          </a:p>
+        </p:txBody>
+      </p:sp>
+    </p:spTree>
+    <p:extLst>
+      <p:ext uri="{BB962C8B-B14F-4D97-AF65-F5344CB8AC3E}">
+        <p14:creationId xmlns:p14="http://schemas.microsoft.com/office/powerpoint/2010/main" val="618017606"/>
+      </p:ext>
+    </p:extLst>
+  </p:cSld>
+  <p:clrMapOvr>
+    <a:masterClrMapping/>
+  </p:clrMapOvr>
+</p:notes>
+</file>
+
+<file path=ppt/notesSlides/notesSlide11.xml><?xml version="1.0" encoding="utf-8"?>
+<p:notes xmlns:a="http://schemas.openxmlformats.org/drawingml/2006/main" xmlns:r="http://schemas.openxmlformats.org/officeDocument/2006/relationships" xmlns:p="http://schemas.openxmlformats.org/presentationml/2006/main">
+  <p:cSld>
+    <p:spTree>
+      <p:nvGrpSpPr>
+        <p:cNvPr id="1" name="">
+          <a:extLst>
+            <a:ext uri="{FF2B5EF4-FFF2-40B4-BE49-F238E27FC236}">
+              <a16:creationId xmlns:a16="http://schemas.microsoft.com/office/drawing/2014/main" id="{9B759D37-549D-8CC9-0945-11C33063EF5F}"/>
+            </a:ext>
+          </a:extLst>
+        </p:cNvPr>
+        <p:cNvGrpSpPr/>
+        <p:nvPr/>
+      </p:nvGrpSpPr>
+      <p:grpSpPr>
+        <a:xfrm>
+          <a:off x="0" y="0"/>
+          <a:ext cx="0" cy="0"/>
+          <a:chOff x="0" y="0"/>
+          <a:chExt cx="0" cy="0"/>
+        </a:xfrm>
+      </p:grpSpPr>
+      <p:sp>
+        <p:nvSpPr>
+          <p:cNvPr id="2" name="Образ слайда 1">
+            <a:extLst>
+              <a:ext uri="{FF2B5EF4-FFF2-40B4-BE49-F238E27FC236}">
+                <a16:creationId xmlns:a16="http://schemas.microsoft.com/office/drawing/2014/main" id="{55701135-7D39-DF56-C03A-E7B586871B7E}"/>
+              </a:ext>
+            </a:extLst>
+          </p:cNvPr>
+          <p:cNvSpPr>
+            <a:spLocks noGrp="1" noRot="1" noChangeAspect="1"/>
+          </p:cNvSpPr>
+          <p:nvPr>
+            <p:ph type="sldImg"/>
+          </p:nvPr>
+        </p:nvSpPr>
+        <p:spPr/>
+      </p:sp>
+      <p:sp>
+        <p:nvSpPr>
+          <p:cNvPr id="3" name="Заметки 2">
+            <a:extLst>
+              <a:ext uri="{FF2B5EF4-FFF2-40B4-BE49-F238E27FC236}">
+                <a16:creationId xmlns:a16="http://schemas.microsoft.com/office/drawing/2014/main" id="{674DE50D-C48D-76A2-403A-A49993769DE6}"/>
+              </a:ext>
+            </a:extLst>
+          </p:cNvPr>
+          <p:cNvSpPr>
+            <a:spLocks noGrp="1"/>
+          </p:cNvSpPr>
+          <p:nvPr>
+            <p:ph type="body" idx="1"/>
+          </p:nvPr>
+        </p:nvSpPr>
+        <p:spPr/>
+        <p:txBody>
+          <a:bodyPr/>
+          <a:lstStyle/>
+          <a:p>
+            <a:endParaRPr lang="ru-RU" dirty="0"/>
+          </a:p>
+        </p:txBody>
+      </p:sp>
+      <p:sp>
+        <p:nvSpPr>
+          <p:cNvPr id="4" name="Номер слайда 3">
+            <a:extLst>
+              <a:ext uri="{FF2B5EF4-FFF2-40B4-BE49-F238E27FC236}">
+                <a16:creationId xmlns:a16="http://schemas.microsoft.com/office/drawing/2014/main" id="{D71E6EF0-12FF-2E24-7648-9332AD43392D}"/>
+              </a:ext>
+            </a:extLst>
+          </p:cNvPr>
+          <p:cNvSpPr>
+            <a:spLocks noGrp="1"/>
+          </p:cNvSpPr>
+          <p:nvPr>
+            <p:ph type="sldNum" sz="quarter" idx="5"/>
+          </p:nvPr>
+        </p:nvSpPr>
+        <p:spPr/>
+        <p:txBody>
+          <a:bodyPr/>
+          <a:lstStyle/>
+          <a:p>
+            <a:fld id="{D6442E75-1FDF-C648-8CC6-4BEE00EE7D3D}" type="slidenum">
+              <a:rPr lang="ru-RU" smtClean="0"/>
+              <a:t>39</a:t>
+            </a:fld>
+            <a:endParaRPr lang="ru-RU"/>
+          </a:p>
+        </p:txBody>
+      </p:sp>
+    </p:spTree>
+    <p:extLst>
+      <p:ext uri="{BB962C8B-B14F-4D97-AF65-F5344CB8AC3E}">
+        <p14:creationId xmlns:p14="http://schemas.microsoft.com/office/powerpoint/2010/main" val="1708365899"/>
       </p:ext>
     </p:extLst>
   </p:cSld>
@@ -19602,7 +19796,7 @@
         </p:nvSpPr>
         <p:spPr bwMode="auto">
           <a:xfrm>
-            <a:off x="8603722" y="3226170"/>
+            <a:off x="8603722" y="3187738"/>
             <a:ext cx="3275488" cy="817868"/>
           </a:xfrm>
           <a:prstGeom prst="roundRect">
@@ -19864,7 +20058,7 @@
         </p:nvSpPr>
         <p:spPr bwMode="auto">
           <a:xfrm>
-            <a:off x="8617899" y="5074916"/>
+            <a:off x="8617899" y="5036484"/>
             <a:ext cx="3275488" cy="817868"/>
           </a:xfrm>
           <a:prstGeom prst="roundRect">
@@ -20479,7 +20673,7 @@
         </p:nvSpPr>
         <p:spPr bwMode="auto">
           <a:xfrm>
-            <a:off x="8603722" y="3226170"/>
+            <a:off x="8603722" y="3187739"/>
             <a:ext cx="3275488" cy="817868"/>
           </a:xfrm>
           <a:prstGeom prst="roundRect">
@@ -20723,7 +20917,7 @@
         </p:nvSpPr>
         <p:spPr bwMode="auto">
           <a:xfrm>
-            <a:off x="8617899" y="5074916"/>
+            <a:off x="8617899" y="5036484"/>
             <a:ext cx="3275488" cy="817868"/>
           </a:xfrm>
           <a:prstGeom prst="roundRect">
@@ -21179,7 +21373,7 @@
         </p:nvSpPr>
         <p:spPr bwMode="auto">
           <a:xfrm>
-            <a:off x="8603722" y="1340848"/>
+            <a:off x="8603722" y="1338993"/>
             <a:ext cx="3278896" cy="817868"/>
           </a:xfrm>
           <a:prstGeom prst="roundRect">
@@ -21493,7 +21687,7 @@
         </p:nvSpPr>
         <p:spPr bwMode="auto">
           <a:xfrm>
-            <a:off x="8603722" y="3226170"/>
+            <a:off x="8603722" y="3187739"/>
             <a:ext cx="3275488" cy="817868"/>
           </a:xfrm>
           <a:prstGeom prst="roundRect">
@@ -21789,7 +21983,7 @@
         </p:nvSpPr>
         <p:spPr bwMode="auto">
           <a:xfrm>
-            <a:off x="8617899" y="5074916"/>
+            <a:off x="8617899" y="5036484"/>
             <a:ext cx="3275488" cy="817868"/>
           </a:xfrm>
           <a:prstGeom prst="roundRect">
@@ -26977,6 +27171,1435 @@
     <p:extLst>
       <p:ext uri="{BB962C8B-B14F-4D97-AF65-F5344CB8AC3E}">
         <p14:creationId xmlns:p14="http://schemas.microsoft.com/office/powerpoint/2010/main" val="680980804"/>
+      </p:ext>
+    </p:extLst>
+  </p:cSld>
+  <p:clrMapOvr>
+    <a:masterClrMapping/>
+  </p:clrMapOvr>
+</p:sld>
+</file>
+
+<file path=ppt/slides/slide38.xml><?xml version="1.0" encoding="utf-8"?>
+<p:sld xmlns:a="http://schemas.openxmlformats.org/drawingml/2006/main" xmlns:r="http://schemas.openxmlformats.org/officeDocument/2006/relationships" xmlns:p="http://schemas.openxmlformats.org/presentationml/2006/main">
+  <p:cSld>
+    <p:spTree>
+      <p:nvGrpSpPr>
+        <p:cNvPr id="1" name="">
+          <a:extLst>
+            <a:ext uri="{FF2B5EF4-FFF2-40B4-BE49-F238E27FC236}">
+              <a16:creationId xmlns:a16="http://schemas.microsoft.com/office/drawing/2014/main" id="{C1F7F2AD-393B-3624-68FC-687D63AD2143}"/>
+            </a:ext>
+          </a:extLst>
+        </p:cNvPr>
+        <p:cNvGrpSpPr/>
+        <p:nvPr/>
+      </p:nvGrpSpPr>
+      <p:grpSpPr>
+        <a:xfrm>
+          <a:off x="0" y="0"/>
+          <a:ext cx="0" cy="0"/>
+          <a:chOff x="0" y="0"/>
+          <a:chExt cx="0" cy="0"/>
+        </a:xfrm>
+      </p:grpSpPr>
+      <p:sp>
+        <p:nvSpPr>
+          <p:cNvPr id="3" name="Rectangle 1">
+            <a:extLst>
+              <a:ext uri="{FF2B5EF4-FFF2-40B4-BE49-F238E27FC236}">
+                <a16:creationId xmlns:a16="http://schemas.microsoft.com/office/drawing/2014/main" id="{A1F1DD1B-1590-E9B2-7655-393D60E88C39}"/>
+              </a:ext>
+            </a:extLst>
+          </p:cNvPr>
+          <p:cNvSpPr>
+            <a:spLocks noChangeArrowheads="1"/>
+          </p:cNvSpPr>
+          <p:nvPr/>
+        </p:nvSpPr>
+        <p:spPr bwMode="auto">
+          <a:xfrm>
+            <a:off x="374014" y="993594"/>
+            <a:ext cx="7391759" cy="1508669"/>
+          </a:xfrm>
+          <a:prstGeom prst="rect">
+            <a:avLst/>
+          </a:prstGeom>
+          <a:noFill/>
+          <a:ln>
+            <a:noFill/>
+          </a:ln>
+          <a:effectLst/>
+          <a:extLst>
+            <a:ext uri="{909E8E84-426E-40DD-AFC4-6F175D3DCCD1}">
+              <a14:hiddenFill xmlns:a14="http://schemas.microsoft.com/office/drawing/2010/main">
+                <a:solidFill>
+                  <a:schemeClr val="accent1"/>
+                </a:solidFill>
+              </a14:hiddenFill>
+            </a:ext>
+            <a:ext uri="{91240B29-F687-4F45-9708-019B960494DF}">
+              <a14:hiddenLine xmlns:a14="http://schemas.microsoft.com/office/drawing/2010/main" w="9525">
+                <a:solidFill>
+                  <a:schemeClr val="tx1"/>
+                </a:solidFill>
+                <a:miter lim="800000"/>
+                <a:headEnd/>
+                <a:tailEnd/>
+              </a14:hiddenLine>
+            </a:ext>
+            <a:ext uri="{AF507438-7753-43E0-B8FC-AC1667EBCBE1}">
+              <a14:hiddenEffects xmlns:a14="http://schemas.microsoft.com/office/drawing/2010/main">
+                <a:effectLst>
+                  <a:outerShdw dist="35921" dir="2700000" algn="ctr" rotWithShape="0">
+                    <a:schemeClr val="bg2"/>
+                  </a:outerShdw>
+                </a:effectLst>
+              </a14:hiddenEffects>
+            </a:ext>
+          </a:extLst>
+        </p:spPr>
+        <p:txBody>
+          <a:bodyPr vert="horz" wrap="square" lIns="0" tIns="122199" rIns="0" bIns="122199" numCol="1" anchor="ctr" anchorCtr="0" compatLnSpc="1">
+            <a:prstTxWarp prst="textNoShape">
+              <a:avLst/>
+            </a:prstTxWarp>
+            <a:spAutoFit/>
+          </a:bodyPr>
+          <a:lstStyle/>
+          <a:p>
+            <a:pPr lvl="0" eaLnBrk="0" fontAlgn="base" hangingPunct="0">
+              <a:spcBef>
+                <a:spcPct val="0"/>
+              </a:spcBef>
+              <a:spcAft>
+                <a:spcPct val="0"/>
+              </a:spcAft>
+            </a:pPr>
+            <a:r>
+              <a:rPr kumimoji="0" lang="ru-RU" altLang="ru-RU" b="1" i="0" u="none" strike="noStrike" cap="none" normalizeH="0" baseline="0" dirty="0">
+                <a:ln>
+                  <a:noFill/>
+                </a:ln>
+                <a:solidFill>
+                  <a:srgbClr val="0F1115"/>
+                </a:solidFill>
+                <a:effectLst/>
+              </a:rPr>
+              <a:t>Сегмент №</a:t>
+            </a:r>
+            <a:r>
+              <a:rPr kumimoji="0" lang="en-US" altLang="ru-RU" b="1" i="0" u="none" strike="noStrike" cap="none" normalizeH="0" baseline="0" dirty="0">
+                <a:ln>
+                  <a:noFill/>
+                </a:ln>
+                <a:solidFill>
+                  <a:srgbClr val="0F1115"/>
+                </a:solidFill>
+                <a:effectLst/>
+              </a:rPr>
+              <a:t>1</a:t>
+            </a:r>
+            <a:r>
+              <a:rPr kumimoji="0" lang="ru-RU" altLang="ru-RU" b="1" i="0" u="none" strike="noStrike" cap="none" normalizeH="0" baseline="0" dirty="0">
+                <a:ln>
+                  <a:noFill/>
+                </a:ln>
+                <a:solidFill>
+                  <a:srgbClr val="0F1115"/>
+                </a:solidFill>
+                <a:effectLst/>
+              </a:rPr>
+              <a:t> </a:t>
+            </a:r>
+            <a:r>
+              <a:rPr kumimoji="0" lang="ru-RU" altLang="ru-RU" i="0" u="none" strike="noStrike" cap="none" normalizeH="0" baseline="0" dirty="0">
+                <a:ln>
+                  <a:noFill/>
+                </a:ln>
+                <a:solidFill>
+                  <a:srgbClr val="0F1115"/>
+                </a:solidFill>
+                <a:effectLst/>
+              </a:rPr>
+              <a:t>– </a:t>
+            </a:r>
+            <a:r>
+              <a:rPr kumimoji="0" lang="en-US" altLang="ru-RU" b="1" i="0" u="none" strike="noStrike" cap="none" normalizeH="0" baseline="0" dirty="0">
+                <a:ln>
+                  <a:noFill/>
+                </a:ln>
+                <a:solidFill>
+                  <a:srgbClr val="0F1115"/>
+                </a:solidFill>
+                <a:effectLst/>
+              </a:rPr>
+              <a:t>VIP</a:t>
+            </a:r>
+            <a:br>
+              <a:rPr kumimoji="0" lang="ru-RU" altLang="ru-RU" i="0" u="none" strike="noStrike" cap="none" normalizeH="0" baseline="0" dirty="0">
+                <a:ln>
+                  <a:noFill/>
+                </a:ln>
+                <a:solidFill>
+                  <a:srgbClr val="0F1115"/>
+                </a:solidFill>
+                <a:effectLst/>
+              </a:rPr>
+            </a:br>
+            <a:r>
+              <a:rPr lang="ru-RU" altLang="ru-RU" sz="1600" dirty="0">
+                <a:solidFill>
+                  <a:srgbClr val="0F1115"/>
+                </a:solidFill>
+              </a:rPr>
+              <a:t>М</a:t>
+            </a:r>
+            <a:r>
+              <a:rPr kumimoji="0" lang="ru-RU" altLang="ru-RU" sz="1600" i="0" u="none" strike="noStrike" cap="none" normalizeH="0" baseline="0" dirty="0">
+                <a:ln>
+                  <a:noFill/>
+                </a:ln>
+                <a:solidFill>
+                  <a:srgbClr val="0F1115"/>
+                </a:solidFill>
+                <a:effectLst/>
+              </a:rPr>
+              <a:t>ужчина </a:t>
+            </a:r>
+            <a:r>
+              <a:rPr kumimoji="0" lang="en-US" altLang="ru-RU" sz="1600" i="0" u="none" strike="noStrike" cap="none" normalizeH="0" baseline="0" dirty="0">
+                <a:ln>
+                  <a:noFill/>
+                </a:ln>
+                <a:solidFill>
+                  <a:srgbClr val="0F1115"/>
+                </a:solidFill>
+                <a:effectLst/>
+              </a:rPr>
+              <a:t>36-</a:t>
+            </a:r>
+            <a:r>
+              <a:rPr kumimoji="0" lang="ru-RU" altLang="ru-RU" sz="1600" i="0" u="none" strike="noStrike" cap="none" normalizeH="0" baseline="0" dirty="0" err="1">
+                <a:ln>
+                  <a:noFill/>
+                </a:ln>
+                <a:solidFill>
+                  <a:srgbClr val="0F1115"/>
+                </a:solidFill>
+                <a:effectLst/>
+              </a:rPr>
+              <a:t>ти</a:t>
+            </a:r>
+            <a:r>
+              <a:rPr kumimoji="0" lang="ru-RU" altLang="ru-RU" sz="1600" i="0" u="none" strike="noStrike" cap="none" normalizeH="0" baseline="0" dirty="0">
+                <a:ln>
+                  <a:noFill/>
+                </a:ln>
+                <a:solidFill>
+                  <a:srgbClr val="0F1115"/>
+                </a:solidFill>
+                <a:effectLst/>
+              </a:rPr>
+              <a:t> лет в браке без детей. Работает </a:t>
+            </a:r>
+            <a:r>
+              <a:rPr lang="ru-RU" altLang="ru-RU" sz="1600" dirty="0">
+                <a:solidFill>
+                  <a:srgbClr val="0F1115"/>
+                </a:solidFill>
+              </a:rPr>
+              <a:t>специалистом в ООО и зарабатывает от 250 тыс. руб., что может подтвердить справкой по форме банка.  Имеет 11 кредитов на ремонт с подключением страховки и без залога. Совокупный ежемесячный платеж составляет 144 тыс. руб., бывают просрочки.</a:t>
+            </a:r>
+            <a:endParaRPr kumimoji="0" lang="ru-RU" altLang="ru-RU" b="0" i="0" u="none" strike="noStrike" cap="none" normalizeH="0" baseline="0" dirty="0">
+              <a:ln>
+                <a:noFill/>
+              </a:ln>
+              <a:solidFill>
+                <a:schemeClr val="tx1"/>
+              </a:solidFill>
+              <a:effectLst/>
+            </a:endParaRPr>
+          </a:p>
+        </p:txBody>
+      </p:sp>
+      <p:sp>
+        <p:nvSpPr>
+          <p:cNvPr id="5" name="Rectangle 1">
+            <a:extLst>
+              <a:ext uri="{FF2B5EF4-FFF2-40B4-BE49-F238E27FC236}">
+                <a16:creationId xmlns:a16="http://schemas.microsoft.com/office/drawing/2014/main" id="{676D8D70-6C87-4A8E-1B9A-55EBF129C411}"/>
+              </a:ext>
+            </a:extLst>
+          </p:cNvPr>
+          <p:cNvSpPr>
+            <a:spLocks noChangeArrowheads="1"/>
+          </p:cNvSpPr>
+          <p:nvPr/>
+        </p:nvSpPr>
+        <p:spPr bwMode="auto">
+          <a:xfrm>
+            <a:off x="8603722" y="1477055"/>
+            <a:ext cx="3278896" cy="545453"/>
+          </a:xfrm>
+          <a:prstGeom prst="roundRect">
+            <a:avLst/>
+          </a:prstGeom>
+          <a:solidFill>
+            <a:schemeClr val="bg1">
+              <a:lumMod val="95000"/>
+            </a:schemeClr>
+          </a:solidFill>
+          <a:ln>
+            <a:noFill/>
+          </a:ln>
+          <a:effectLst/>
+        </p:spPr>
+        <p:txBody>
+          <a:bodyPr vert="horz" wrap="square" lIns="0" tIns="122199" rIns="0" bIns="122199" numCol="1" anchor="ctr" anchorCtr="0" compatLnSpc="1">
+            <a:prstTxWarp prst="textNoShape">
+              <a:avLst/>
+            </a:prstTxWarp>
+            <a:spAutoFit/>
+          </a:bodyPr>
+          <a:lstStyle/>
+          <a:p>
+            <a:pPr lvl="0" algn="ctr" eaLnBrk="0" fontAlgn="base" hangingPunct="0">
+              <a:spcBef>
+                <a:spcPct val="0"/>
+              </a:spcBef>
+              <a:spcAft>
+                <a:spcPct val="0"/>
+              </a:spcAft>
+            </a:pPr>
+            <a:r>
+              <a:rPr lang="ru-RU" altLang="ru-RU" sz="1600" dirty="0">
+                <a:solidFill>
+                  <a:srgbClr val="0F1115"/>
+                </a:solidFill>
+              </a:rPr>
+              <a:t>лучший клиент</a:t>
+            </a:r>
+          </a:p>
+        </p:txBody>
+      </p:sp>
+      <p:sp>
+        <p:nvSpPr>
+          <p:cNvPr id="7" name="Заголовок 1">
+            <a:extLst>
+              <a:ext uri="{FF2B5EF4-FFF2-40B4-BE49-F238E27FC236}">
+                <a16:creationId xmlns:a16="http://schemas.microsoft.com/office/drawing/2014/main" id="{2469C3D6-A76D-BFC2-AB02-93A954E12A84}"/>
+              </a:ext>
+            </a:extLst>
+          </p:cNvPr>
+          <p:cNvSpPr txBox="1">
+            <a:spLocks/>
+          </p:cNvSpPr>
+          <p:nvPr/>
+        </p:nvSpPr>
+        <p:spPr>
+          <a:xfrm>
+            <a:off x="254746" y="246610"/>
+            <a:ext cx="7532761" cy="746983"/>
+          </a:xfrm>
+          <a:prstGeom prst="rect">
+            <a:avLst/>
+          </a:prstGeom>
+        </p:spPr>
+        <p:txBody>
+          <a:bodyPr vert="horz" lIns="91440" tIns="45720" rIns="91440" bIns="45720" rtlCol="0" anchor="ctr">
+            <a:noAutofit/>
+          </a:bodyPr>
+          <a:lstStyle>
+            <a:lvl1pPr algn="l" defTabSz="914400" rtl="0" eaLnBrk="1" latinLnBrk="0" hangingPunct="1">
+              <a:lnSpc>
+                <a:spcPct val="90000"/>
+              </a:lnSpc>
+              <a:spcBef>
+                <a:spcPct val="0"/>
+              </a:spcBef>
+              <a:buNone/>
+              <a:defRPr sz="4400" kern="1200">
+                <a:solidFill>
+                  <a:schemeClr val="tx1"/>
+                </a:solidFill>
+                <a:latin typeface="+mj-lt"/>
+                <a:ea typeface="+mj-ea"/>
+                <a:cs typeface="+mj-cs"/>
+              </a:defRPr>
+            </a:lvl1pPr>
+          </a:lstStyle>
+          <a:p>
+            <a:pPr>
+              <a:lnSpc>
+                <a:spcPct val="100000"/>
+              </a:lnSpc>
+            </a:pPr>
+            <a:r>
+              <a:rPr lang="ru-RU" altLang="ru-RU" sz="2400" b="1" dirty="0">
+                <a:solidFill>
+                  <a:srgbClr val="800000"/>
+                </a:solidFill>
+                <a:latin typeface="Aptos" panose="020B0004020202020204" pitchFamily="34" charset="0"/>
+              </a:rPr>
+              <a:t>Сегментация клиентов  </a:t>
+            </a:r>
+            <a:r>
+              <a:rPr lang="ru-RU" altLang="ru-RU" sz="1800" dirty="0">
+                <a:solidFill>
+                  <a:schemeClr val="bg1">
+                    <a:lumMod val="50000"/>
+                  </a:schemeClr>
+                </a:solidFill>
+                <a:latin typeface="Aptos" panose="020B0004020202020204" pitchFamily="34" charset="0"/>
+              </a:rPr>
+              <a:t>методом «Квартили </a:t>
+            </a:r>
+            <a:r>
+              <a:rPr lang="en-US" altLang="ru-RU" sz="1800" dirty="0">
+                <a:solidFill>
+                  <a:schemeClr val="bg1">
+                    <a:lumMod val="50000"/>
+                  </a:schemeClr>
+                </a:solidFill>
+                <a:latin typeface="Aptos" panose="020B0004020202020204" pitchFamily="34" charset="0"/>
+              </a:rPr>
+              <a:t>(RFM)</a:t>
+            </a:r>
+            <a:r>
+              <a:rPr lang="ru-RU" altLang="ru-RU" sz="1800" dirty="0">
+                <a:solidFill>
+                  <a:schemeClr val="bg1">
+                    <a:lumMod val="50000"/>
+                  </a:schemeClr>
+                </a:solidFill>
+                <a:latin typeface="Aptos" panose="020B0004020202020204" pitchFamily="34" charset="0"/>
+              </a:rPr>
+              <a:t>»</a:t>
+            </a:r>
+          </a:p>
+        </p:txBody>
+      </p:sp>
+      <p:sp>
+        <p:nvSpPr>
+          <p:cNvPr id="9" name="Rectangle 1">
+            <a:extLst>
+              <a:ext uri="{FF2B5EF4-FFF2-40B4-BE49-F238E27FC236}">
+                <a16:creationId xmlns:a16="http://schemas.microsoft.com/office/drawing/2014/main" id="{AABEEACD-AA8E-BBDF-85ED-2BC9B124EBCE}"/>
+              </a:ext>
+            </a:extLst>
+          </p:cNvPr>
+          <p:cNvSpPr>
+            <a:spLocks/>
+          </p:cNvSpPr>
+          <p:nvPr/>
+        </p:nvSpPr>
+        <p:spPr bwMode="auto">
+          <a:xfrm>
+            <a:off x="374013" y="2842340"/>
+            <a:ext cx="7532761" cy="1508669"/>
+          </a:xfrm>
+          <a:prstGeom prst="rect">
+            <a:avLst/>
+          </a:prstGeom>
+          <a:noFill/>
+          <a:ln>
+            <a:noFill/>
+          </a:ln>
+          <a:effectLst/>
+          <a:extLst>
+            <a:ext uri="{909E8E84-426E-40DD-AFC4-6F175D3DCCD1}">
+              <a14:hiddenFill xmlns:a14="http://schemas.microsoft.com/office/drawing/2010/main">
+                <a:solidFill>
+                  <a:schemeClr val="accent1"/>
+                </a:solidFill>
+              </a14:hiddenFill>
+            </a:ext>
+            <a:ext uri="{91240B29-F687-4F45-9708-019B960494DF}">
+              <a14:hiddenLine xmlns:a14="http://schemas.microsoft.com/office/drawing/2010/main" w="9525">
+                <a:solidFill>
+                  <a:schemeClr val="tx1"/>
+                </a:solidFill>
+                <a:miter lim="800000"/>
+                <a:headEnd/>
+                <a:tailEnd/>
+              </a14:hiddenLine>
+            </a:ext>
+            <a:ext uri="{AF507438-7753-43E0-B8FC-AC1667EBCBE1}">
+              <a14:hiddenEffects xmlns:a14="http://schemas.microsoft.com/office/drawing/2010/main">
+                <a:effectLst>
+                  <a:outerShdw dist="35921" dir="2700000" algn="ctr" rotWithShape="0">
+                    <a:schemeClr val="bg2"/>
+                  </a:outerShdw>
+                </a:effectLst>
+              </a14:hiddenEffects>
+            </a:ext>
+          </a:extLst>
+        </p:spPr>
+        <p:txBody>
+          <a:bodyPr vert="horz" wrap="square" lIns="0" tIns="122199" rIns="0" bIns="122199" numCol="1" anchor="ctr" anchorCtr="0" compatLnSpc="1">
+            <a:prstTxWarp prst="textNoShape">
+              <a:avLst/>
+            </a:prstTxWarp>
+            <a:spAutoFit/>
+          </a:bodyPr>
+          <a:lstStyle/>
+          <a:p>
+            <a:pPr lvl="0" eaLnBrk="0" fontAlgn="base" hangingPunct="0">
+              <a:spcBef>
+                <a:spcPct val="0"/>
+              </a:spcBef>
+              <a:spcAft>
+                <a:spcPct val="0"/>
+              </a:spcAft>
+            </a:pPr>
+            <a:r>
+              <a:rPr kumimoji="0" lang="ru-RU" altLang="ru-RU" b="1" i="0" u="none" strike="noStrike" cap="none" normalizeH="0" baseline="0" dirty="0">
+                <a:ln>
+                  <a:noFill/>
+                </a:ln>
+                <a:solidFill>
+                  <a:srgbClr val="0F1115"/>
+                </a:solidFill>
+                <a:effectLst/>
+              </a:rPr>
+              <a:t>Сегмент №2 </a:t>
+            </a:r>
+            <a:r>
+              <a:rPr kumimoji="0" lang="ru-RU" altLang="ru-RU" i="0" u="none" strike="noStrike" cap="none" normalizeH="0" baseline="0" dirty="0">
+                <a:ln>
+                  <a:noFill/>
+                </a:ln>
+                <a:solidFill>
+                  <a:srgbClr val="0F1115"/>
+                </a:solidFill>
+                <a:effectLst/>
+              </a:rPr>
+              <a:t>– </a:t>
+            </a:r>
+            <a:r>
+              <a:rPr kumimoji="0" lang="en-US" altLang="ru-RU" b="1" i="0" u="none" strike="noStrike" cap="none" normalizeH="0" baseline="0" dirty="0">
+                <a:ln>
+                  <a:noFill/>
+                </a:ln>
+                <a:solidFill>
+                  <a:srgbClr val="0F1115"/>
+                </a:solidFill>
+                <a:effectLst/>
+              </a:rPr>
+              <a:t>Loyal</a:t>
+            </a:r>
+          </a:p>
+          <a:p>
+            <a:pPr lvl="0" eaLnBrk="0" fontAlgn="base" hangingPunct="0">
+              <a:spcBef>
+                <a:spcPct val="0"/>
+              </a:spcBef>
+              <a:spcAft>
+                <a:spcPct val="0"/>
+              </a:spcAft>
+            </a:pPr>
+            <a:r>
+              <a:rPr kumimoji="0" lang="ru-RU" altLang="ru-RU" sz="1600" i="0" u="none" strike="noStrike" cap="none" normalizeH="0" baseline="0" dirty="0">
+                <a:ln>
+                  <a:noFill/>
+                </a:ln>
+                <a:solidFill>
+                  <a:srgbClr val="0F1115"/>
+                </a:solidFill>
+                <a:effectLst/>
+              </a:rPr>
+              <a:t>34-х летняя</a:t>
+            </a:r>
+            <a:r>
+              <a:rPr kumimoji="0" lang="en-US" altLang="ru-RU" sz="1600" i="0" u="none" strike="noStrike" cap="none" normalizeH="0" baseline="0" dirty="0">
+                <a:ln>
+                  <a:noFill/>
+                </a:ln>
+                <a:solidFill>
+                  <a:srgbClr val="0F1115"/>
+                </a:solidFill>
+                <a:effectLst/>
+              </a:rPr>
+              <a:t> </a:t>
+            </a:r>
+            <a:r>
+              <a:rPr kumimoji="0" lang="ru-RU" altLang="ru-RU" sz="1600" i="0" u="none" strike="noStrike" cap="none" normalizeH="0" baseline="0" dirty="0">
+                <a:ln>
+                  <a:noFill/>
+                </a:ln>
+                <a:solidFill>
+                  <a:srgbClr val="0F1115"/>
+                </a:solidFill>
+                <a:effectLst/>
+              </a:rPr>
+              <a:t>замужняя женщина без детей. Работает в ООО в сфере торговли на должности специалиста. Доход составляет 250+ тыс. руб., из которых 83 тыс. руб. уходят на погашение 7 кредитов со страховкой и без залога. В кредитной истории присутствуют просрочки.  </a:t>
+            </a:r>
+            <a:endParaRPr kumimoji="0" lang="ru-RU" altLang="ru-RU" b="0" i="0" u="none" strike="noStrike" cap="none" normalizeH="0" baseline="0" dirty="0">
+              <a:ln>
+                <a:noFill/>
+              </a:ln>
+              <a:solidFill>
+                <a:schemeClr val="tx1"/>
+              </a:solidFill>
+              <a:effectLst/>
+            </a:endParaRPr>
+          </a:p>
+        </p:txBody>
+      </p:sp>
+      <p:sp>
+        <p:nvSpPr>
+          <p:cNvPr id="10" name="Rectangle 1">
+            <a:extLst>
+              <a:ext uri="{FF2B5EF4-FFF2-40B4-BE49-F238E27FC236}">
+                <a16:creationId xmlns:a16="http://schemas.microsoft.com/office/drawing/2014/main" id="{2C9E5F4A-3E90-937D-F9CD-09D3A791FF7A}"/>
+              </a:ext>
+            </a:extLst>
+          </p:cNvPr>
+          <p:cNvSpPr>
+            <a:spLocks noChangeArrowheads="1"/>
+          </p:cNvSpPr>
+          <p:nvPr/>
+        </p:nvSpPr>
+        <p:spPr bwMode="auto">
+          <a:xfrm>
+            <a:off x="8603722" y="3323948"/>
+            <a:ext cx="3275488" cy="545453"/>
+          </a:xfrm>
+          <a:prstGeom prst="roundRect">
+            <a:avLst/>
+          </a:prstGeom>
+          <a:solidFill>
+            <a:schemeClr val="bg1">
+              <a:lumMod val="95000"/>
+            </a:schemeClr>
+          </a:solidFill>
+          <a:ln>
+            <a:noFill/>
+          </a:ln>
+          <a:effectLst/>
+        </p:spPr>
+        <p:txBody>
+          <a:bodyPr vert="horz" wrap="square" lIns="0" tIns="122199" rIns="0" bIns="122199" numCol="1" anchor="ctr" anchorCtr="0" compatLnSpc="1">
+            <a:prstTxWarp prst="textNoShape">
+              <a:avLst/>
+            </a:prstTxWarp>
+            <a:spAutoFit/>
+          </a:bodyPr>
+          <a:lstStyle/>
+          <a:p>
+            <a:pPr lvl="0" algn="ctr" eaLnBrk="0" fontAlgn="base" hangingPunct="0">
+              <a:spcBef>
+                <a:spcPct val="0"/>
+              </a:spcBef>
+              <a:spcAft>
+                <a:spcPct val="0"/>
+              </a:spcAft>
+            </a:pPr>
+            <a:r>
+              <a:rPr lang="ru-RU" altLang="ru-RU" sz="1600" dirty="0">
+                <a:solidFill>
+                  <a:srgbClr val="0F1115"/>
+                </a:solidFill>
+              </a:rPr>
+              <a:t>хороший постоянный клиент</a:t>
+            </a:r>
+          </a:p>
+        </p:txBody>
+      </p:sp>
+      <p:sp>
+        <p:nvSpPr>
+          <p:cNvPr id="14" name="Rectangle 1">
+            <a:extLst>
+              <a:ext uri="{FF2B5EF4-FFF2-40B4-BE49-F238E27FC236}">
+                <a16:creationId xmlns:a16="http://schemas.microsoft.com/office/drawing/2014/main" id="{0558BF05-A21D-76D3-5B95-DD2E52E2A5B1}"/>
+              </a:ext>
+            </a:extLst>
+          </p:cNvPr>
+          <p:cNvSpPr>
+            <a:spLocks/>
+          </p:cNvSpPr>
+          <p:nvPr/>
+        </p:nvSpPr>
+        <p:spPr bwMode="auto">
+          <a:xfrm>
+            <a:off x="388191" y="4691084"/>
+            <a:ext cx="7532760" cy="1508669"/>
+          </a:xfrm>
+          <a:prstGeom prst="rect">
+            <a:avLst/>
+          </a:prstGeom>
+          <a:noFill/>
+          <a:ln>
+            <a:noFill/>
+          </a:ln>
+          <a:effectLst/>
+          <a:extLst>
+            <a:ext uri="{909E8E84-426E-40DD-AFC4-6F175D3DCCD1}">
+              <a14:hiddenFill xmlns:a14="http://schemas.microsoft.com/office/drawing/2010/main">
+                <a:solidFill>
+                  <a:schemeClr val="accent1"/>
+                </a:solidFill>
+              </a14:hiddenFill>
+            </a:ext>
+            <a:ext uri="{91240B29-F687-4F45-9708-019B960494DF}">
+              <a14:hiddenLine xmlns:a14="http://schemas.microsoft.com/office/drawing/2010/main" w="9525">
+                <a:solidFill>
+                  <a:schemeClr val="tx1"/>
+                </a:solidFill>
+                <a:miter lim="800000"/>
+                <a:headEnd/>
+                <a:tailEnd/>
+              </a14:hiddenLine>
+            </a:ext>
+            <a:ext uri="{AF507438-7753-43E0-B8FC-AC1667EBCBE1}">
+              <a14:hiddenEffects xmlns:a14="http://schemas.microsoft.com/office/drawing/2010/main">
+                <a:effectLst>
+                  <a:outerShdw dist="35921" dir="2700000" algn="ctr" rotWithShape="0">
+                    <a:schemeClr val="bg2"/>
+                  </a:outerShdw>
+                </a:effectLst>
+              </a14:hiddenEffects>
+            </a:ext>
+          </a:extLst>
+        </p:spPr>
+        <p:txBody>
+          <a:bodyPr vert="horz" wrap="square" lIns="0" tIns="122199" rIns="0" bIns="122199" numCol="1" anchor="ctr" anchorCtr="0" compatLnSpc="1">
+            <a:prstTxWarp prst="textNoShape">
+              <a:avLst/>
+            </a:prstTxWarp>
+            <a:spAutoFit/>
+          </a:bodyPr>
+          <a:lstStyle/>
+          <a:p>
+            <a:pPr lvl="0" eaLnBrk="0" fontAlgn="base" hangingPunct="0">
+              <a:spcBef>
+                <a:spcPct val="0"/>
+              </a:spcBef>
+              <a:spcAft>
+                <a:spcPct val="0"/>
+              </a:spcAft>
+            </a:pPr>
+            <a:r>
+              <a:rPr kumimoji="0" lang="ru-RU" altLang="ru-RU" b="1" i="0" u="none" strike="noStrike" cap="none" normalizeH="0" baseline="0" dirty="0">
+                <a:ln>
+                  <a:noFill/>
+                </a:ln>
+                <a:solidFill>
+                  <a:srgbClr val="0F1115"/>
+                </a:solidFill>
+                <a:effectLst/>
+              </a:rPr>
+              <a:t>Сегмент №3 </a:t>
+            </a:r>
+            <a:r>
+              <a:rPr kumimoji="0" lang="ru-RU" altLang="ru-RU" i="0" u="none" strike="noStrike" cap="none" normalizeH="0" baseline="0" dirty="0">
+                <a:ln>
+                  <a:noFill/>
+                </a:ln>
+                <a:solidFill>
+                  <a:srgbClr val="0F1115"/>
+                </a:solidFill>
+                <a:effectLst/>
+              </a:rPr>
+              <a:t>– </a:t>
+            </a:r>
+            <a:r>
+              <a:rPr kumimoji="0" lang="en-US" altLang="ru-RU" b="1" i="0" u="none" strike="noStrike" cap="none" normalizeH="0" baseline="0" dirty="0">
+                <a:ln>
+                  <a:noFill/>
+                </a:ln>
+                <a:solidFill>
+                  <a:srgbClr val="0F1115"/>
+                </a:solidFill>
+                <a:effectLst/>
+              </a:rPr>
+              <a:t>Core</a:t>
+            </a:r>
+            <a:br>
+              <a:rPr kumimoji="0" lang="ru-RU" altLang="ru-RU" i="0" u="none" strike="noStrike" cap="none" normalizeH="0" baseline="0" dirty="0">
+                <a:ln>
+                  <a:noFill/>
+                </a:ln>
+                <a:solidFill>
+                  <a:srgbClr val="0F1115"/>
+                </a:solidFill>
+                <a:effectLst/>
+              </a:rPr>
+            </a:br>
+            <a:r>
+              <a:rPr kumimoji="0" lang="ru-RU" altLang="ru-RU" sz="1600" i="0" u="none" strike="noStrike" cap="none" normalizeH="0" baseline="0" dirty="0">
+                <a:ln>
+                  <a:noFill/>
+                </a:ln>
+                <a:solidFill>
+                  <a:srgbClr val="0F1115"/>
+                </a:solidFill>
+                <a:effectLst/>
+              </a:rPr>
+              <a:t>Мужчина, 37 лет, состоит в браке и не имеет детей. Зарабатывает свыше 250 тыс. руб. в торговой компании на должности специалиста. Имеет 3 кредита на ремонт, с подключенной страховкой и без залогового обеспечения. Общий платеж составляет 29 тыс. руб. в месяц. Просрочек по кредитам не допускает. </a:t>
+            </a:r>
+            <a:endParaRPr kumimoji="0" lang="ru-RU" altLang="ru-RU" b="0" i="0" u="none" strike="noStrike" cap="none" normalizeH="0" baseline="0" dirty="0">
+              <a:ln>
+                <a:noFill/>
+              </a:ln>
+              <a:solidFill>
+                <a:schemeClr val="tx1"/>
+              </a:solidFill>
+              <a:effectLst/>
+            </a:endParaRPr>
+          </a:p>
+        </p:txBody>
+      </p:sp>
+      <p:sp>
+        <p:nvSpPr>
+          <p:cNvPr id="19" name="Rectangle 1">
+            <a:extLst>
+              <a:ext uri="{FF2B5EF4-FFF2-40B4-BE49-F238E27FC236}">
+                <a16:creationId xmlns:a16="http://schemas.microsoft.com/office/drawing/2014/main" id="{453CD627-88C7-49B3-EABA-F51014FBE21A}"/>
+              </a:ext>
+            </a:extLst>
+          </p:cNvPr>
+          <p:cNvSpPr>
+            <a:spLocks noChangeArrowheads="1"/>
+          </p:cNvSpPr>
+          <p:nvPr/>
+        </p:nvSpPr>
+        <p:spPr bwMode="auto">
+          <a:xfrm>
+            <a:off x="8617899" y="5172692"/>
+            <a:ext cx="3275488" cy="545453"/>
+          </a:xfrm>
+          <a:prstGeom prst="roundRect">
+            <a:avLst/>
+          </a:prstGeom>
+          <a:solidFill>
+            <a:schemeClr val="bg1">
+              <a:lumMod val="95000"/>
+            </a:schemeClr>
+          </a:solidFill>
+          <a:ln>
+            <a:noFill/>
+          </a:ln>
+          <a:effectLst/>
+        </p:spPr>
+        <p:txBody>
+          <a:bodyPr vert="horz" wrap="square" lIns="0" tIns="122199" rIns="0" bIns="122199" numCol="1" anchor="ctr" anchorCtr="0" compatLnSpc="1">
+            <a:prstTxWarp prst="textNoShape">
+              <a:avLst/>
+            </a:prstTxWarp>
+            <a:spAutoFit/>
+          </a:bodyPr>
+          <a:lstStyle/>
+          <a:p>
+            <a:pPr lvl="0" algn="ctr" eaLnBrk="0" fontAlgn="base" hangingPunct="0">
+              <a:spcBef>
+                <a:spcPct val="0"/>
+              </a:spcBef>
+              <a:spcAft>
+                <a:spcPct val="0"/>
+              </a:spcAft>
+            </a:pPr>
+            <a:r>
+              <a:rPr lang="ru-RU" altLang="ru-RU" sz="1600" dirty="0">
+                <a:solidFill>
+                  <a:srgbClr val="0F1115"/>
+                </a:solidFill>
+              </a:rPr>
+              <a:t>основной клиент</a:t>
+            </a:r>
+          </a:p>
+        </p:txBody>
+      </p:sp>
+    </p:spTree>
+    <p:extLst>
+      <p:ext uri="{BB962C8B-B14F-4D97-AF65-F5344CB8AC3E}">
+        <p14:creationId xmlns:p14="http://schemas.microsoft.com/office/powerpoint/2010/main" val="2234830188"/>
+      </p:ext>
+    </p:extLst>
+  </p:cSld>
+  <p:clrMapOvr>
+    <a:masterClrMapping/>
+  </p:clrMapOvr>
+</p:sld>
+</file>
+
+<file path=ppt/slides/slide39.xml><?xml version="1.0" encoding="utf-8"?>
+<p:sld xmlns:a="http://schemas.openxmlformats.org/drawingml/2006/main" xmlns:r="http://schemas.openxmlformats.org/officeDocument/2006/relationships" xmlns:p="http://schemas.openxmlformats.org/presentationml/2006/main">
+  <p:cSld>
+    <p:spTree>
+      <p:nvGrpSpPr>
+        <p:cNvPr id="1" name="">
+          <a:extLst>
+            <a:ext uri="{FF2B5EF4-FFF2-40B4-BE49-F238E27FC236}">
+              <a16:creationId xmlns:a16="http://schemas.microsoft.com/office/drawing/2014/main" id="{F6714DDF-7EA7-D2F7-7417-93B4EBC768F7}"/>
+            </a:ext>
+          </a:extLst>
+        </p:cNvPr>
+        <p:cNvGrpSpPr/>
+        <p:nvPr/>
+      </p:nvGrpSpPr>
+      <p:grpSpPr>
+        <a:xfrm>
+          <a:off x="0" y="0"/>
+          <a:ext cx="0" cy="0"/>
+          <a:chOff x="0" y="0"/>
+          <a:chExt cx="0" cy="0"/>
+        </a:xfrm>
+      </p:grpSpPr>
+      <p:sp>
+        <p:nvSpPr>
+          <p:cNvPr id="3" name="Rectangle 1">
+            <a:extLst>
+              <a:ext uri="{FF2B5EF4-FFF2-40B4-BE49-F238E27FC236}">
+                <a16:creationId xmlns:a16="http://schemas.microsoft.com/office/drawing/2014/main" id="{E719060A-0236-6A2D-4414-80CC37D64F56}"/>
+              </a:ext>
+            </a:extLst>
+          </p:cNvPr>
+          <p:cNvSpPr>
+            <a:spLocks noChangeArrowheads="1"/>
+          </p:cNvSpPr>
+          <p:nvPr/>
+        </p:nvSpPr>
+        <p:spPr bwMode="auto">
+          <a:xfrm>
+            <a:off x="374014" y="993593"/>
+            <a:ext cx="7391759" cy="1508669"/>
+          </a:xfrm>
+          <a:prstGeom prst="rect">
+            <a:avLst/>
+          </a:prstGeom>
+          <a:noFill/>
+          <a:ln>
+            <a:noFill/>
+          </a:ln>
+          <a:effectLst/>
+          <a:extLst>
+            <a:ext uri="{909E8E84-426E-40DD-AFC4-6F175D3DCCD1}">
+              <a14:hiddenFill xmlns:a14="http://schemas.microsoft.com/office/drawing/2010/main">
+                <a:solidFill>
+                  <a:schemeClr val="accent1"/>
+                </a:solidFill>
+              </a14:hiddenFill>
+            </a:ext>
+            <a:ext uri="{91240B29-F687-4F45-9708-019B960494DF}">
+              <a14:hiddenLine xmlns:a14="http://schemas.microsoft.com/office/drawing/2010/main" w="9525">
+                <a:solidFill>
+                  <a:schemeClr val="tx1"/>
+                </a:solidFill>
+                <a:miter lim="800000"/>
+                <a:headEnd/>
+                <a:tailEnd/>
+              </a14:hiddenLine>
+            </a:ext>
+            <a:ext uri="{AF507438-7753-43E0-B8FC-AC1667EBCBE1}">
+              <a14:hiddenEffects xmlns:a14="http://schemas.microsoft.com/office/drawing/2010/main">
+                <a:effectLst>
+                  <a:outerShdw dist="35921" dir="2700000" algn="ctr" rotWithShape="0">
+                    <a:schemeClr val="bg2"/>
+                  </a:outerShdw>
+                </a:effectLst>
+              </a14:hiddenEffects>
+            </a:ext>
+          </a:extLst>
+        </p:spPr>
+        <p:txBody>
+          <a:bodyPr vert="horz" wrap="square" lIns="0" tIns="122199" rIns="0" bIns="122199" numCol="1" anchor="ctr" anchorCtr="0" compatLnSpc="1">
+            <a:prstTxWarp prst="textNoShape">
+              <a:avLst/>
+            </a:prstTxWarp>
+            <a:spAutoFit/>
+          </a:bodyPr>
+          <a:lstStyle/>
+          <a:p>
+            <a:pPr lvl="0" eaLnBrk="0" fontAlgn="base" hangingPunct="0">
+              <a:spcBef>
+                <a:spcPct val="0"/>
+              </a:spcBef>
+              <a:spcAft>
+                <a:spcPct val="0"/>
+              </a:spcAft>
+            </a:pPr>
+            <a:r>
+              <a:rPr kumimoji="0" lang="ru-RU" altLang="ru-RU" b="1" i="0" u="none" strike="noStrike" cap="none" normalizeH="0" baseline="0" dirty="0">
+                <a:ln>
+                  <a:noFill/>
+                </a:ln>
+                <a:solidFill>
+                  <a:srgbClr val="0F1115"/>
+                </a:solidFill>
+                <a:effectLst/>
+              </a:rPr>
+              <a:t>Сегмент №</a:t>
+            </a:r>
+            <a:r>
+              <a:rPr lang="ru-RU" altLang="ru-RU" b="1" dirty="0">
+                <a:solidFill>
+                  <a:srgbClr val="0F1115"/>
+                </a:solidFill>
+              </a:rPr>
+              <a:t>4</a:t>
+            </a:r>
+            <a:r>
+              <a:rPr kumimoji="0" lang="ru-RU" altLang="ru-RU" b="1" i="0" u="none" strike="noStrike" cap="none" normalizeH="0" baseline="0" dirty="0">
+                <a:ln>
+                  <a:noFill/>
+                </a:ln>
+                <a:solidFill>
+                  <a:srgbClr val="0F1115"/>
+                </a:solidFill>
+                <a:effectLst/>
+              </a:rPr>
+              <a:t> </a:t>
+            </a:r>
+            <a:r>
+              <a:rPr kumimoji="0" lang="ru-RU" altLang="ru-RU" i="0" u="none" strike="noStrike" cap="none" normalizeH="0" baseline="0" dirty="0">
+                <a:ln>
+                  <a:noFill/>
+                </a:ln>
+                <a:solidFill>
+                  <a:srgbClr val="0F1115"/>
+                </a:solidFill>
+                <a:effectLst/>
+              </a:rPr>
+              <a:t>– </a:t>
+            </a:r>
+            <a:r>
+              <a:rPr kumimoji="0" lang="en-US" altLang="ru-RU" b="1" i="0" u="none" strike="noStrike" cap="none" normalizeH="0" baseline="0" dirty="0">
+                <a:ln>
+                  <a:noFill/>
+                </a:ln>
+                <a:solidFill>
+                  <a:srgbClr val="0F1115"/>
+                </a:solidFill>
+                <a:effectLst/>
+              </a:rPr>
+              <a:t>Lost</a:t>
+            </a:r>
+            <a:br>
+              <a:rPr kumimoji="0" lang="ru-RU" altLang="ru-RU" i="0" u="none" strike="noStrike" cap="none" normalizeH="0" baseline="0" dirty="0">
+                <a:ln>
+                  <a:noFill/>
+                </a:ln>
+                <a:solidFill>
+                  <a:srgbClr val="0F1115"/>
+                </a:solidFill>
+                <a:effectLst/>
+              </a:rPr>
+            </a:br>
+            <a:r>
+              <a:rPr kumimoji="0" lang="ru-RU" altLang="ru-RU" sz="1600" i="0" u="none" strike="noStrike" cap="none" normalizeH="0" baseline="0" dirty="0">
+                <a:ln>
+                  <a:noFill/>
+                </a:ln>
+                <a:solidFill>
+                  <a:srgbClr val="0F1115"/>
+                </a:solidFill>
+                <a:effectLst/>
+              </a:rPr>
+              <a:t>33-х летняя женщина в браке без детей. Трудоустроена специалистом в торговую компанию. Доход от 250 тыс. руб., может быть подтвержден выпиской по счету. Является заемщиком по 3 кредитам со страховкой и без залога. Общий платеж составляет </a:t>
+            </a:r>
+            <a:r>
+              <a:rPr lang="ru-RU" altLang="ru-RU" sz="1600" dirty="0">
+                <a:solidFill>
+                  <a:srgbClr val="0F1115"/>
+                </a:solidFill>
+              </a:rPr>
+              <a:t>34 тыс. руб.</a:t>
+            </a:r>
+            <a:r>
+              <a:rPr kumimoji="0" lang="ru-RU" altLang="ru-RU" sz="1600" i="0" u="none" strike="noStrike" cap="none" normalizeH="0" baseline="0" dirty="0">
+                <a:ln>
+                  <a:noFill/>
+                </a:ln>
+                <a:solidFill>
+                  <a:srgbClr val="0F1115"/>
+                </a:solidFill>
+                <a:effectLst/>
+              </a:rPr>
+              <a:t>, просрочек нет</a:t>
+            </a:r>
+            <a:endParaRPr kumimoji="0" lang="ru-RU" altLang="ru-RU" b="0" i="0" u="none" strike="noStrike" cap="none" normalizeH="0" baseline="0" dirty="0">
+              <a:ln>
+                <a:noFill/>
+              </a:ln>
+              <a:solidFill>
+                <a:schemeClr val="tx1"/>
+              </a:solidFill>
+              <a:effectLst/>
+            </a:endParaRPr>
+          </a:p>
+        </p:txBody>
+      </p:sp>
+      <p:sp>
+        <p:nvSpPr>
+          <p:cNvPr id="5" name="Rectangle 1">
+            <a:extLst>
+              <a:ext uri="{FF2B5EF4-FFF2-40B4-BE49-F238E27FC236}">
+                <a16:creationId xmlns:a16="http://schemas.microsoft.com/office/drawing/2014/main" id="{AADAE6C4-F66C-5316-DE7B-ED4DC0E04D0F}"/>
+              </a:ext>
+            </a:extLst>
+          </p:cNvPr>
+          <p:cNvSpPr>
+            <a:spLocks noChangeArrowheads="1"/>
+          </p:cNvSpPr>
+          <p:nvPr/>
+        </p:nvSpPr>
+        <p:spPr bwMode="auto">
+          <a:xfrm>
+            <a:off x="8603722" y="1475201"/>
+            <a:ext cx="3278896" cy="545453"/>
+          </a:xfrm>
+          <a:prstGeom prst="roundRect">
+            <a:avLst/>
+          </a:prstGeom>
+          <a:solidFill>
+            <a:schemeClr val="bg1">
+              <a:lumMod val="95000"/>
+            </a:schemeClr>
+          </a:solidFill>
+          <a:ln>
+            <a:noFill/>
+          </a:ln>
+          <a:effectLst/>
+        </p:spPr>
+        <p:txBody>
+          <a:bodyPr vert="horz" wrap="square" lIns="0" tIns="122199" rIns="0" bIns="122199" numCol="1" anchor="ctr" anchorCtr="0" compatLnSpc="1">
+            <a:prstTxWarp prst="textNoShape">
+              <a:avLst/>
+            </a:prstTxWarp>
+            <a:spAutoFit/>
+          </a:bodyPr>
+          <a:lstStyle/>
+          <a:p>
+            <a:pPr lvl="0" algn="ctr" eaLnBrk="0" fontAlgn="base" hangingPunct="0">
+              <a:spcBef>
+                <a:spcPct val="0"/>
+              </a:spcBef>
+              <a:spcAft>
+                <a:spcPct val="0"/>
+              </a:spcAft>
+            </a:pPr>
+            <a:r>
+              <a:rPr lang="ru-RU" altLang="ru-RU" sz="1600" dirty="0">
+                <a:solidFill>
+                  <a:srgbClr val="0F1115"/>
+                </a:solidFill>
+              </a:rPr>
+              <a:t>потерянный клиент</a:t>
+            </a:r>
+          </a:p>
+        </p:txBody>
+      </p:sp>
+      <p:sp>
+        <p:nvSpPr>
+          <p:cNvPr id="7" name="Заголовок 1">
+            <a:extLst>
+              <a:ext uri="{FF2B5EF4-FFF2-40B4-BE49-F238E27FC236}">
+                <a16:creationId xmlns:a16="http://schemas.microsoft.com/office/drawing/2014/main" id="{D13A72CE-7897-F2DF-7A75-801C9A0853AA}"/>
+              </a:ext>
+            </a:extLst>
+          </p:cNvPr>
+          <p:cNvSpPr txBox="1">
+            <a:spLocks/>
+          </p:cNvSpPr>
+          <p:nvPr/>
+        </p:nvSpPr>
+        <p:spPr>
+          <a:xfrm>
+            <a:off x="254746" y="246610"/>
+            <a:ext cx="7532761" cy="746983"/>
+          </a:xfrm>
+          <a:prstGeom prst="rect">
+            <a:avLst/>
+          </a:prstGeom>
+        </p:spPr>
+        <p:txBody>
+          <a:bodyPr vert="horz" lIns="91440" tIns="45720" rIns="91440" bIns="45720" rtlCol="0" anchor="ctr">
+            <a:noAutofit/>
+          </a:bodyPr>
+          <a:lstStyle>
+            <a:lvl1pPr algn="l" defTabSz="914400" rtl="0" eaLnBrk="1" latinLnBrk="0" hangingPunct="1">
+              <a:lnSpc>
+                <a:spcPct val="90000"/>
+              </a:lnSpc>
+              <a:spcBef>
+                <a:spcPct val="0"/>
+              </a:spcBef>
+              <a:buNone/>
+              <a:defRPr sz="4400" kern="1200">
+                <a:solidFill>
+                  <a:schemeClr val="tx1"/>
+                </a:solidFill>
+                <a:latin typeface="+mj-lt"/>
+                <a:ea typeface="+mj-ea"/>
+                <a:cs typeface="+mj-cs"/>
+              </a:defRPr>
+            </a:lvl1pPr>
+          </a:lstStyle>
+          <a:p>
+            <a:pPr>
+              <a:lnSpc>
+                <a:spcPct val="100000"/>
+              </a:lnSpc>
+            </a:pPr>
+            <a:r>
+              <a:rPr lang="ru-RU" altLang="ru-RU" sz="2400" b="1" dirty="0">
+                <a:solidFill>
+                  <a:srgbClr val="800000"/>
+                </a:solidFill>
+                <a:latin typeface="Aptos" panose="020B0004020202020204" pitchFamily="34" charset="0"/>
+              </a:rPr>
+              <a:t>Сегментация клиентов  </a:t>
+            </a:r>
+            <a:r>
+              <a:rPr lang="ru-RU" altLang="ru-RU" sz="1800" dirty="0">
+                <a:solidFill>
+                  <a:schemeClr val="bg1">
+                    <a:lumMod val="50000"/>
+                  </a:schemeClr>
+                </a:solidFill>
+                <a:latin typeface="Aptos" panose="020B0004020202020204" pitchFamily="34" charset="0"/>
+              </a:rPr>
+              <a:t>методом «Квартили </a:t>
+            </a:r>
+            <a:r>
+              <a:rPr lang="en-US" altLang="ru-RU" sz="1800" dirty="0">
+                <a:solidFill>
+                  <a:schemeClr val="bg1">
+                    <a:lumMod val="50000"/>
+                  </a:schemeClr>
+                </a:solidFill>
+                <a:latin typeface="Aptos" panose="020B0004020202020204" pitchFamily="34" charset="0"/>
+              </a:rPr>
+              <a:t>(RFM)</a:t>
+            </a:r>
+            <a:r>
+              <a:rPr lang="ru-RU" altLang="ru-RU" sz="1800" dirty="0">
+                <a:solidFill>
+                  <a:schemeClr val="bg1">
+                    <a:lumMod val="50000"/>
+                  </a:schemeClr>
+                </a:solidFill>
+                <a:latin typeface="Aptos" panose="020B0004020202020204" pitchFamily="34" charset="0"/>
+              </a:rPr>
+              <a:t>»</a:t>
+            </a:r>
+          </a:p>
+        </p:txBody>
+      </p:sp>
+      <p:sp>
+        <p:nvSpPr>
+          <p:cNvPr id="9" name="Rectangle 1">
+            <a:extLst>
+              <a:ext uri="{FF2B5EF4-FFF2-40B4-BE49-F238E27FC236}">
+                <a16:creationId xmlns:a16="http://schemas.microsoft.com/office/drawing/2014/main" id="{B0178A51-2FF7-C50E-AF96-7C440C6FCDA7}"/>
+              </a:ext>
+            </a:extLst>
+          </p:cNvPr>
+          <p:cNvSpPr>
+            <a:spLocks/>
+          </p:cNvSpPr>
+          <p:nvPr/>
+        </p:nvSpPr>
+        <p:spPr bwMode="auto">
+          <a:xfrm>
+            <a:off x="374013" y="2842340"/>
+            <a:ext cx="7532761" cy="1508669"/>
+          </a:xfrm>
+          <a:prstGeom prst="rect">
+            <a:avLst/>
+          </a:prstGeom>
+          <a:noFill/>
+          <a:ln>
+            <a:noFill/>
+          </a:ln>
+          <a:effectLst/>
+          <a:extLst>
+            <a:ext uri="{909E8E84-426E-40DD-AFC4-6F175D3DCCD1}">
+              <a14:hiddenFill xmlns:a14="http://schemas.microsoft.com/office/drawing/2010/main">
+                <a:solidFill>
+                  <a:schemeClr val="accent1"/>
+                </a:solidFill>
+              </a14:hiddenFill>
+            </a:ext>
+            <a:ext uri="{91240B29-F687-4F45-9708-019B960494DF}">
+              <a14:hiddenLine xmlns:a14="http://schemas.microsoft.com/office/drawing/2010/main" w="9525">
+                <a:solidFill>
+                  <a:schemeClr val="tx1"/>
+                </a:solidFill>
+                <a:miter lim="800000"/>
+                <a:headEnd/>
+                <a:tailEnd/>
+              </a14:hiddenLine>
+            </a:ext>
+            <a:ext uri="{AF507438-7753-43E0-B8FC-AC1667EBCBE1}">
+              <a14:hiddenEffects xmlns:a14="http://schemas.microsoft.com/office/drawing/2010/main">
+                <a:effectLst>
+                  <a:outerShdw dist="35921" dir="2700000" algn="ctr" rotWithShape="0">
+                    <a:schemeClr val="bg2"/>
+                  </a:outerShdw>
+                </a:effectLst>
+              </a14:hiddenEffects>
+            </a:ext>
+          </a:extLst>
+        </p:spPr>
+        <p:txBody>
+          <a:bodyPr vert="horz" wrap="square" lIns="0" tIns="122199" rIns="0" bIns="122199" numCol="1" anchor="ctr" anchorCtr="0" compatLnSpc="1">
+            <a:prstTxWarp prst="textNoShape">
+              <a:avLst/>
+            </a:prstTxWarp>
+            <a:spAutoFit/>
+          </a:bodyPr>
+          <a:lstStyle/>
+          <a:p>
+            <a:pPr lvl="0" eaLnBrk="0" fontAlgn="base" hangingPunct="0">
+              <a:spcBef>
+                <a:spcPct val="0"/>
+              </a:spcBef>
+              <a:spcAft>
+                <a:spcPct val="0"/>
+              </a:spcAft>
+            </a:pPr>
+            <a:r>
+              <a:rPr kumimoji="0" lang="ru-RU" altLang="ru-RU" b="1" i="0" u="none" strike="noStrike" cap="none" normalizeH="0" baseline="0" dirty="0">
+                <a:ln>
+                  <a:noFill/>
+                </a:ln>
+                <a:solidFill>
+                  <a:srgbClr val="0F1115"/>
+                </a:solidFill>
+                <a:effectLst/>
+              </a:rPr>
+              <a:t>Сегмент №5 </a:t>
+            </a:r>
+            <a:r>
+              <a:rPr kumimoji="0" lang="ru-RU" altLang="ru-RU" i="0" u="none" strike="noStrike" cap="none" normalizeH="0" baseline="0" dirty="0">
+                <a:ln>
+                  <a:noFill/>
+                </a:ln>
+                <a:solidFill>
+                  <a:srgbClr val="0F1115"/>
+                </a:solidFill>
+                <a:effectLst/>
+              </a:rPr>
+              <a:t>– </a:t>
+            </a:r>
+            <a:r>
+              <a:rPr kumimoji="0" lang="en-US" altLang="ru-RU" b="1" i="0" u="none" strike="noStrike" cap="none" normalizeH="0" baseline="0" dirty="0">
+                <a:ln>
+                  <a:noFill/>
+                </a:ln>
+                <a:solidFill>
+                  <a:srgbClr val="0F1115"/>
+                </a:solidFill>
+                <a:effectLst/>
+              </a:rPr>
+              <a:t>At Risk</a:t>
+            </a:r>
+          </a:p>
+          <a:p>
+            <a:pPr lvl="0" eaLnBrk="0" fontAlgn="base" hangingPunct="0">
+              <a:spcBef>
+                <a:spcPct val="0"/>
+              </a:spcBef>
+              <a:spcAft>
+                <a:spcPct val="0"/>
+              </a:spcAft>
+            </a:pPr>
+            <a:r>
+              <a:rPr lang="ru-RU" altLang="ru-RU" sz="1600" dirty="0">
+                <a:solidFill>
+                  <a:srgbClr val="0F1115"/>
+                </a:solidFill>
+              </a:rPr>
+              <a:t>Замужняя женщина 37-и лет, не имеющая детей. Занята в ООО в сфере торговли. Ежемесячный доход превышает 250 тыс. руб., и может быть подтвержден справкой по форме банка. Имеет 6 кредитов на ремонт с ежемесячным платежом188 тыс. руб. Допускает просрочки, есть страховка, залог не оформлен </a:t>
+            </a:r>
+            <a:endParaRPr kumimoji="0" lang="ru-RU" altLang="ru-RU" b="0" i="0" u="none" strike="noStrike" cap="none" normalizeH="0" baseline="0" dirty="0">
+              <a:ln>
+                <a:noFill/>
+              </a:ln>
+              <a:solidFill>
+                <a:schemeClr val="tx1"/>
+              </a:solidFill>
+              <a:effectLst/>
+            </a:endParaRPr>
+          </a:p>
+        </p:txBody>
+      </p:sp>
+      <p:sp>
+        <p:nvSpPr>
+          <p:cNvPr id="10" name="Rectangle 1">
+            <a:extLst>
+              <a:ext uri="{FF2B5EF4-FFF2-40B4-BE49-F238E27FC236}">
+                <a16:creationId xmlns:a16="http://schemas.microsoft.com/office/drawing/2014/main" id="{6BFB7DD2-7361-6D12-8A80-F19A523F35B4}"/>
+              </a:ext>
+            </a:extLst>
+          </p:cNvPr>
+          <p:cNvSpPr>
+            <a:spLocks noChangeArrowheads="1"/>
+          </p:cNvSpPr>
+          <p:nvPr/>
+        </p:nvSpPr>
+        <p:spPr bwMode="auto">
+          <a:xfrm>
+            <a:off x="8603722" y="3323948"/>
+            <a:ext cx="3275488" cy="545453"/>
+          </a:xfrm>
+          <a:prstGeom prst="roundRect">
+            <a:avLst/>
+          </a:prstGeom>
+          <a:solidFill>
+            <a:schemeClr val="bg1">
+              <a:lumMod val="95000"/>
+            </a:schemeClr>
+          </a:solidFill>
+          <a:ln>
+            <a:noFill/>
+          </a:ln>
+          <a:effectLst/>
+        </p:spPr>
+        <p:txBody>
+          <a:bodyPr vert="horz" wrap="square" lIns="0" tIns="122199" rIns="0" bIns="122199" numCol="1" anchor="ctr" anchorCtr="0" compatLnSpc="1">
+            <a:prstTxWarp prst="textNoShape">
+              <a:avLst/>
+            </a:prstTxWarp>
+            <a:spAutoFit/>
+          </a:bodyPr>
+          <a:lstStyle/>
+          <a:p>
+            <a:pPr lvl="0" algn="ctr" eaLnBrk="0" fontAlgn="base" hangingPunct="0">
+              <a:spcBef>
+                <a:spcPct val="0"/>
+              </a:spcBef>
+              <a:spcAft>
+                <a:spcPct val="0"/>
+              </a:spcAft>
+            </a:pPr>
+            <a:r>
+              <a:rPr lang="ru-RU" altLang="ru-RU" sz="1600" dirty="0">
+                <a:solidFill>
+                  <a:srgbClr val="0F1115"/>
+                </a:solidFill>
+              </a:rPr>
+              <a:t>клиент с признаком оттока</a:t>
+            </a:r>
+            <a:endParaRPr kumimoji="0" lang="ru-RU" altLang="ru-RU" sz="1600" b="0" i="0" u="none" strike="noStrike" cap="none" normalizeH="0" baseline="0" dirty="0">
+              <a:ln>
+                <a:noFill/>
+              </a:ln>
+              <a:solidFill>
+                <a:srgbClr val="0F1115"/>
+              </a:solidFill>
+              <a:effectLst/>
+            </a:endParaRPr>
+          </a:p>
+        </p:txBody>
+      </p:sp>
+    </p:spTree>
+    <p:extLst>
+      <p:ext uri="{BB962C8B-B14F-4D97-AF65-F5344CB8AC3E}">
+        <p14:creationId xmlns:p14="http://schemas.microsoft.com/office/powerpoint/2010/main" val="2425922946"/>
       </p:ext>
     </p:extLst>
   </p:cSld>
